--- a/public/fun/pack/pptx/wedding/결혼식_32_러브스토리중심_도서관창가.pptx
+++ b/public/fun/pack/pptx/wedding/결혼식_32_러브스토리중심_도서관창가.pptx
@@ -3286,6 +3286,14 @@
 <file path=ppt/slides/slide1.xml><?xml version="1.0" encoding="utf-8"?>
 <p:sld xmlns:a="http://schemas.openxmlformats.org/drawingml/2006/main" xmlns:p="http://schemas.openxmlformats.org/presentationml/2006/main" xmlns:r="http://schemas.openxmlformats.org/officeDocument/2006/relationships">
   <p:cSld>
+    <p:bg>
+      <p:bgPr>
+        <a:solidFill>
+          <a:srgbClr val="FBF2EC"/>
+        </a:solidFill>
+        <a:effectLst/>
+      </p:bgPr>
+    </p:bg>
     <p:spTree>
       <p:nvGrpSpPr>
         <p:cNvPr id="1" name=""/>
@@ -3293,30 +3301,119 @@
         <p:nvPr/>
       </p:nvGrpSpPr>
       <p:grpSpPr/>
-      <p:pic>
-        <p:nvPicPr>
-          <p:cNvPr id="3" name="표지 그림" descr="wedding-32.jpg"/>
-          <p:cNvPicPr>
-            <a:picLocks noChangeAspect="1"/>
-          </p:cNvPicPr>
-          <p:nvPr/>
-        </p:nvPicPr>
-        <p:blipFill>
-          <a:blip r:embed="rId2"/>
-          <a:stretch>
-            <a:fillRect/>
-          </a:stretch>
-        </p:blipFill>
-        <p:spPr>
-          <a:xfrm>
-            <a:off x="0" y="0"/>
-            <a:ext cx="12191695" cy="6858000"/>
+      <p:sp>
+        <p:nvSpPr>
+          <p:cNvPr id="3" name="사진 자리"/>
+          <p:cNvSpPr/>
+          <p:nvPr/>
+        </p:nvSpPr>
+        <p:spPr>
+          <a:xfrm>
+            <a:off x="7558851" y="685800"/>
+            <a:ext cx="3169840" cy="5486400"/>
+          </a:xfrm>
+          <a:prstGeom prst="round2SameRect">
+            <a:avLst>
+              <a:gd name="adj1" fmla="val 50000"/>
+              <a:gd name="adj2" fmla="val 0"/>
+            </a:avLst>
+          </a:prstGeom>
+          <a:solidFill>
+            <a:srgbClr val="EBC6AD"/>
+          </a:solidFill>
+          <a:ln>
+            <a:noFill/>
+          </a:ln>
+        </p:spPr>
+        <p:txBody>
+          <a:bodyPr rtlCol="0" anchor="ctr" wrap="square" lIns="54864" rIns="54864" tIns="27432" bIns="27432">
+            <a:noAutofit/>
+          </a:bodyPr>
+          <a:lstStyle/>
+          <a:p>
+            <a:pPr algn="ctr">
+              <a:lnSpc>
+                <a:spcPct val="100000"/>
+              </a:lnSpc>
+            </a:pPr>
+            <a:r>
+              <a:rPr sz="1400" b="0" i="0">
+                <a:solidFill>
+                  <a:srgbClr val="493527"/>
+                </a:solidFill>
+              </a:rPr>
+              <a:t>사진을 넣어 주세요</a:t>
+            </a:r>
+          </a:p>
+        </p:txBody>
+      </p:sp>
+      <p:sp>
+        <p:nvSpPr>
+          <p:cNvPr id="4" name="장식"/>
+          <p:cNvSpPr/>
+          <p:nvPr/>
+        </p:nvSpPr>
+        <p:spPr>
+          <a:xfrm>
+            <a:off x="6827349" y="4251960"/>
+            <a:ext cx="1005840" cy="1005840"/>
+          </a:xfrm>
+          <a:prstGeom prst="ellipse">
+            <a:avLst/>
+          </a:prstGeom>
+          <a:solidFill>
+            <a:srgbClr val="EBC6AD"/>
+          </a:solidFill>
+          <a:ln>
+            <a:noFill/>
+          </a:ln>
+        </p:spPr>
+        <p:txBody>
+          <a:bodyPr rtlCol="0" anchor="ctr"/>
+          <a:lstStyle/>
+          <a:p>
+            <a:pPr algn="ctr"/>
+          </a:p>
+        </p:txBody>
+      </p:sp>
+      <p:sp>
+        <p:nvSpPr>
+          <p:cNvPr id="5" name="라벨"/>
+          <p:cNvSpPr txBox="1"/>
+          <p:nvPr/>
+        </p:nvSpPr>
+        <p:spPr>
+          <a:xfrm>
+            <a:off x="822960" y="2148840"/>
+            <a:ext cx="5608179" cy="274320"/>
           </a:xfrm>
           <a:prstGeom prst="rect">
             <a:avLst/>
           </a:prstGeom>
-        </p:spPr>
-      </p:pic>
+          <a:noFill/>
+        </p:spPr>
+        <p:txBody>
+          <a:bodyPr wrap="square" lIns="54864" rIns="54864" tIns="27432" bIns="27432" anchor="t">
+            <a:noAutofit/>
+          </a:bodyPr>
+          <a:lstStyle/>
+          <a:p>
+            <a:pPr algn="l">
+              <a:lnSpc>
+                <a:spcPct val="115000"/>
+              </a:lnSpc>
+            </a:pPr>
+            <a:r>
+              <a:rPr sz="1000" b="1" i="0" spc="250">
+                <a:solidFill>
+                  <a:srgbClr val="26231F"/>
+                </a:solidFill>
+              </a:rPr>
+              <a:t>WEDDING</a:t>
+            </a:r>
+          </a:p>
+        </p:txBody>
+      </p:sp>
       <p:sp>
         <p:nvSpPr>
           <p:cNvPr id="2" name="Title 1"/>
@@ -3329,8 +3426,8 @@
         </p:nvSpPr>
         <p:spPr>
           <a:xfrm>
-            <a:off x="853418" y="2057400"/>
-            <a:ext cx="6095847" cy="1554480"/>
+            <a:off x="822960" y="2606040"/>
+            <a:ext cx="5608179" cy="1188720"/>
           </a:xfrm>
         </p:spPr>
         <p:txBody>
@@ -3347,7 +3444,7 @@
             <a:r>
               <a:rPr sz="3600" b="1" i="0">
                 <a:solidFill>
-                  <a:srgbClr val="37261A"/>
+                  <a:srgbClr val="26231F"/>
                 </a:solidFill>
               </a:rPr>
               <a:t>저희 결혼합니다</a:t>
@@ -3357,14 +3454,14 @@
       </p:sp>
       <p:sp>
         <p:nvSpPr>
-          <p:cNvPr id="4" name="한 줄 문구"/>
+          <p:cNvPr id="6" name="한 줄 문구"/>
           <p:cNvSpPr txBox="1"/>
           <p:nvPr/>
         </p:nvSpPr>
         <p:spPr>
           <a:xfrm>
-            <a:off x="853418" y="3749039"/>
-            <a:ext cx="6095847" cy="822960"/>
+            <a:off x="822960" y="3886200"/>
+            <a:ext cx="5608179" cy="822960"/>
           </a:xfrm>
           <a:prstGeom prst="rect">
             <a:avLst/>
@@ -3383,9 +3480,9 @@
               </a:lnSpc>
             </a:pPr>
             <a:r>
-              <a:rPr sz="1700" b="0" i="1">
-                <a:solidFill>
-                  <a:srgbClr val="37261A"/>
+              <a:rPr sz="1700" b="0" i="0">
+                <a:solidFill>
+                  <a:srgbClr val="26231F"/>
                 </a:solidFill>
               </a:rPr>
               <a:t>프러포즈는 아주 소박했습니다</a:t>
@@ -3395,14 +3492,14 @@
       </p:sp>
       <p:sp>
         <p:nvSpPr>
-          <p:cNvPr id="5" name="안내 문구"/>
+          <p:cNvPr id="7" name="안내 문구"/>
           <p:cNvSpPr txBox="1"/>
           <p:nvPr/>
         </p:nvSpPr>
         <p:spPr>
           <a:xfrm>
-            <a:off x="853418" y="4617720"/>
-            <a:ext cx="6095847" cy="914400"/>
+            <a:off x="822960" y="4754880"/>
+            <a:ext cx="5608179" cy="914400"/>
           </a:xfrm>
           <a:prstGeom prst="rect">
             <a:avLst/>
@@ -3423,7 +3520,7 @@
             <a:r>
               <a:rPr sz="1400" b="0" i="0">
                 <a:solidFill>
-                  <a:srgbClr val="666666"/>
+                  <a:srgbClr val="26231F"/>
                 </a:solidFill>
               </a:rPr>
               <a:t>신랑 이름 ♥ 신부 이름</a:t>
@@ -3438,10 +3535,10 @@
             <a:r>
               <a:rPr sz="1400" b="0" i="0">
                 <a:solidFill>
-                  <a:srgbClr val="666666"/>
+                  <a:srgbClr val="26231F"/>
                 </a:solidFill>
               </a:rPr>
-              <a:t>2027. 00. 00 · 예식장 이름</a:t>
+              <a:t>날짜 입력 · 예식장 이름</a:t>
             </a:r>
           </a:p>
         </p:txBody>
@@ -3460,7 +3557,7 @@
     <p:bg>
       <p:bgPr>
         <a:solidFill>
-          <a:srgbClr val="FFFFFF"/>
+          <a:srgbClr val="FBF2EC"/>
         </a:solidFill>
         <a:effectLst/>
       </p:bgPr>
@@ -3480,14 +3577,14 @@
         </p:nvSpPr>
         <p:spPr>
           <a:xfrm>
-            <a:off x="0" y="384048"/>
-            <a:ext cx="9509522" cy="896112"/>
-          </a:xfrm>
-          <a:prstGeom prst="homePlate">
+            <a:off x="640080" y="6400800"/>
+            <a:ext cx="10911535" cy="10972"/>
+          </a:xfrm>
+          <a:prstGeom prst="rect">
             <a:avLst/>
           </a:prstGeom>
           <a:solidFill>
-            <a:srgbClr val="765037"/>
+            <a:srgbClr val="26231F"/>
           </a:solidFill>
           <a:ln>
             <a:noFill/>
@@ -3503,6 +3600,73 @@
       </p:sp>
       <p:sp>
         <p:nvSpPr>
+          <p:cNvPr id="4" name="하단 라벨"/>
+          <p:cNvSpPr txBox="1"/>
+          <p:nvPr/>
+        </p:nvSpPr>
+        <p:spPr>
+          <a:xfrm>
+            <a:off x="640080" y="6437376"/>
+            <a:ext cx="5486400" cy="274320"/>
+          </a:xfrm>
+          <a:prstGeom prst="rect">
+            <a:avLst/>
+          </a:prstGeom>
+          <a:noFill/>
+        </p:spPr>
+        <p:txBody>
+          <a:bodyPr wrap="square" lIns="54864" rIns="54864" tIns="27432" bIns="27432" anchor="ctr">
+            <a:noAutofit/>
+          </a:bodyPr>
+          <a:lstStyle/>
+          <a:p>
+            <a:pPr algn="l">
+              <a:lnSpc>
+                <a:spcPct val="115000"/>
+              </a:lnSpc>
+            </a:pPr>
+            <a:r>
+              <a:rPr sz="900" b="1" i="0" spc="250">
+                <a:solidFill>
+                  <a:srgbClr val="26231F"/>
+                </a:solidFill>
+              </a:rPr>
+              <a:t>WEDDING</a:t>
+            </a:r>
+          </a:p>
+        </p:txBody>
+      </p:sp>
+      <p:sp>
+        <p:nvSpPr>
+          <p:cNvPr id="5" name="포인트"/>
+          <p:cNvSpPr/>
+          <p:nvPr/>
+        </p:nvSpPr>
+        <p:spPr>
+          <a:xfrm>
+            <a:off x="11213287" y="6473952"/>
+            <a:ext cx="219456" cy="219456"/>
+          </a:xfrm>
+          <a:prstGeom prst="round2SameRect">
+            <a:avLst/>
+          </a:prstGeom>
+          <a:solidFill>
+            <a:srgbClr val="D89F79"/>
+          </a:solidFill>
+          <a:ln>
+            <a:noFill/>
+          </a:ln>
+        </p:spPr>
+        <p:txBody>
+          <a:bodyPr rtlCol="0" anchor="ctr"/>
+          <a:lstStyle/>
+          <a:p>
+            <a:pPr algn="ctr"/>
+          </a:p>
+        </p:txBody>
+      </p:sp>
+      <p:sp>
+        <p:nvSpPr>
           <p:cNvPr id="2" name="Title 1"/>
           <p:cNvSpPr>
             <a:spLocks noGrp="1"/>
@@ -3513,8 +3677,8 @@
         </p:nvSpPr>
         <p:spPr>
           <a:xfrm>
-            <a:off x="640080" y="411480"/>
-            <a:ext cx="8412242" cy="822960"/>
+            <a:off x="640080" y="502920"/>
+            <a:ext cx="10911535" cy="914400"/>
           </a:xfrm>
         </p:spPr>
         <p:txBody>
@@ -3531,7 +3695,7 @@
             <a:r>
               <a:rPr sz="3000" b="1" i="0">
                 <a:solidFill>
-                  <a:srgbClr val="FFFFFF"/>
+                  <a:srgbClr val="26231F"/>
                 </a:solidFill>
               </a:rPr>
               <a:t>신랑 · 신부 소개</a:t>
@@ -3541,25 +3705,23 @@
       </p:sp>
       <p:sp>
         <p:nvSpPr>
-          <p:cNvPr id="4" name="사진 자리"/>
+          <p:cNvPr id="6" name="사진 자리"/>
           <p:cNvSpPr/>
           <p:nvPr/>
         </p:nvSpPr>
         <p:spPr>
           <a:xfrm>
-            <a:off x="1950643" y="1645920"/>
-            <a:ext cx="2377440" cy="2377440"/>
+            <a:off x="1996363" y="1600200"/>
+            <a:ext cx="2286000" cy="2286000"/>
           </a:xfrm>
           <a:prstGeom prst="ellipse">
             <a:avLst/>
           </a:prstGeom>
           <a:solidFill>
-            <a:srgbClr val="EDDED4"/>
+            <a:srgbClr val="F6E2D5"/>
           </a:solidFill>
           <a:ln w="19050">
-            <a:solidFill>
-              <a:srgbClr val="765037"/>
-            </a:solidFill>
+            <a:noFill/>
             <a:prstDash val="dash"/>
           </a:ln>
         </p:spPr>
@@ -3577,7 +3739,7 @@
             <a:r>
               <a:rPr sz="1200" b="0" i="0">
                 <a:solidFill>
-                  <a:srgbClr val="37261A"/>
+                  <a:srgbClr val="8E8780"/>
                 </a:solidFill>
               </a:rPr>
               <a:t>사진</a:t>
@@ -3587,13 +3749,13 @@
       </p:sp>
       <p:sp>
         <p:nvSpPr>
-          <p:cNvPr id="5" name="TextBox 4"/>
+          <p:cNvPr id="7" name="TextBox 6"/>
           <p:cNvSpPr txBox="1"/>
           <p:nvPr/>
         </p:nvSpPr>
         <p:spPr>
           <a:xfrm>
-            <a:off x="640080" y="4114800"/>
+            <a:off x="640080" y="3977639"/>
             <a:ext cx="4998567" cy="411480"/>
           </a:xfrm>
           <a:prstGeom prst="rect">
@@ -3615,7 +3777,7 @@
             <a:r>
               <a:rPr sz="1600" b="1" i="0">
                 <a:solidFill>
-                  <a:srgbClr val="37261A"/>
+                  <a:srgbClr val="493527"/>
                 </a:solidFill>
               </a:rPr>
               <a:t>신랑</a:t>
@@ -3625,14 +3787,14 @@
       </p:sp>
       <p:sp>
         <p:nvSpPr>
-          <p:cNvPr id="6" name="TextBox 5"/>
+          <p:cNvPr id="8" name="TextBox 7"/>
           <p:cNvSpPr txBox="1"/>
           <p:nvPr/>
         </p:nvSpPr>
         <p:spPr>
           <a:xfrm>
-            <a:off x="731519" y="4572000"/>
-            <a:ext cx="4815687" cy="1828800"/>
+            <a:off x="731519" y="4434840"/>
+            <a:ext cx="4815687" cy="1737360"/>
           </a:xfrm>
           <a:prstGeom prst="rect">
             <a:avLst/>
@@ -3693,25 +3855,23 @@
       </p:sp>
       <p:sp>
         <p:nvSpPr>
-          <p:cNvPr id="7" name="사진 자리"/>
+          <p:cNvPr id="9" name="사진 자리"/>
           <p:cNvSpPr/>
           <p:nvPr/>
         </p:nvSpPr>
         <p:spPr>
           <a:xfrm>
-            <a:off x="7863611" y="1645920"/>
-            <a:ext cx="2377440" cy="2377440"/>
+            <a:off x="7909331" y="1600200"/>
+            <a:ext cx="2286000" cy="2286000"/>
           </a:xfrm>
           <a:prstGeom prst="ellipse">
             <a:avLst/>
           </a:prstGeom>
           <a:solidFill>
-            <a:srgbClr val="EDDED4"/>
+            <a:srgbClr val="F6E2D5"/>
           </a:solidFill>
           <a:ln w="19050">
-            <a:solidFill>
-              <a:srgbClr val="765037"/>
-            </a:solidFill>
+            <a:noFill/>
             <a:prstDash val="dash"/>
           </a:ln>
         </p:spPr>
@@ -3729,7 +3889,7 @@
             <a:r>
               <a:rPr sz="1200" b="0" i="0">
                 <a:solidFill>
-                  <a:srgbClr val="37261A"/>
+                  <a:srgbClr val="8E8780"/>
                 </a:solidFill>
               </a:rPr>
               <a:t>사진</a:t>
@@ -3739,13 +3899,13 @@
       </p:sp>
       <p:sp>
         <p:nvSpPr>
-          <p:cNvPr id="8" name="TextBox 7"/>
+          <p:cNvPr id="10" name="TextBox 9"/>
           <p:cNvSpPr txBox="1"/>
           <p:nvPr/>
         </p:nvSpPr>
         <p:spPr>
           <a:xfrm>
-            <a:off x="6553047" y="4114800"/>
+            <a:off x="6553047" y="3977639"/>
             <a:ext cx="4998567" cy="411480"/>
           </a:xfrm>
           <a:prstGeom prst="rect">
@@ -3767,7 +3927,7 @@
             <a:r>
               <a:rPr sz="1600" b="1" i="0">
                 <a:solidFill>
-                  <a:srgbClr val="37261A"/>
+                  <a:srgbClr val="493527"/>
                 </a:solidFill>
               </a:rPr>
               <a:t>신부</a:t>
@@ -3777,14 +3937,14 @@
       </p:sp>
       <p:sp>
         <p:nvSpPr>
-          <p:cNvPr id="9" name="TextBox 8"/>
+          <p:cNvPr id="11" name="TextBox 10"/>
           <p:cNvSpPr txBox="1"/>
           <p:nvPr/>
         </p:nvSpPr>
         <p:spPr>
           <a:xfrm>
-            <a:off x="6644487" y="4572000"/>
-            <a:ext cx="4815687" cy="1828800"/>
+            <a:off x="6644487" y="4434840"/>
+            <a:ext cx="4815687" cy="1737360"/>
           </a:xfrm>
           <a:prstGeom prst="rect">
             <a:avLst/>
@@ -3857,7 +4017,7 @@
     <p:bg>
       <p:bgPr>
         <a:solidFill>
-          <a:srgbClr val="FFFFFF"/>
+          <a:srgbClr val="FBF2EC"/>
         </a:solidFill>
         <a:effectLst/>
       </p:bgPr>
@@ -3877,14 +4037,14 @@
         </p:nvSpPr>
         <p:spPr>
           <a:xfrm>
-            <a:off x="0" y="384048"/>
-            <a:ext cx="9509522" cy="896112"/>
-          </a:xfrm>
-          <a:prstGeom prst="homePlate">
+            <a:off x="640080" y="6400800"/>
+            <a:ext cx="10911535" cy="10972"/>
+          </a:xfrm>
+          <a:prstGeom prst="rect">
             <a:avLst/>
           </a:prstGeom>
           <a:solidFill>
-            <a:srgbClr val="765037"/>
+            <a:srgbClr val="26231F"/>
           </a:solidFill>
           <a:ln>
             <a:noFill/>
@@ -3900,6 +4060,73 @@
       </p:sp>
       <p:sp>
         <p:nvSpPr>
+          <p:cNvPr id="4" name="하단 라벨"/>
+          <p:cNvSpPr txBox="1"/>
+          <p:nvPr/>
+        </p:nvSpPr>
+        <p:spPr>
+          <a:xfrm>
+            <a:off x="640080" y="6437376"/>
+            <a:ext cx="5486400" cy="274320"/>
+          </a:xfrm>
+          <a:prstGeom prst="rect">
+            <a:avLst/>
+          </a:prstGeom>
+          <a:noFill/>
+        </p:spPr>
+        <p:txBody>
+          <a:bodyPr wrap="square" lIns="54864" rIns="54864" tIns="27432" bIns="27432" anchor="ctr">
+            <a:noAutofit/>
+          </a:bodyPr>
+          <a:lstStyle/>
+          <a:p>
+            <a:pPr algn="l">
+              <a:lnSpc>
+                <a:spcPct val="115000"/>
+              </a:lnSpc>
+            </a:pPr>
+            <a:r>
+              <a:rPr sz="900" b="1" i="0" spc="250">
+                <a:solidFill>
+                  <a:srgbClr val="26231F"/>
+                </a:solidFill>
+              </a:rPr>
+              <a:t>WEDDING</a:t>
+            </a:r>
+          </a:p>
+        </p:txBody>
+      </p:sp>
+      <p:sp>
+        <p:nvSpPr>
+          <p:cNvPr id="5" name="포인트"/>
+          <p:cNvSpPr/>
+          <p:nvPr/>
+        </p:nvSpPr>
+        <p:spPr>
+          <a:xfrm>
+            <a:off x="11213287" y="6473952"/>
+            <a:ext cx="219456" cy="219456"/>
+          </a:xfrm>
+          <a:prstGeom prst="round2SameRect">
+            <a:avLst/>
+          </a:prstGeom>
+          <a:solidFill>
+            <a:srgbClr val="D89F79"/>
+          </a:solidFill>
+          <a:ln>
+            <a:noFill/>
+          </a:ln>
+        </p:spPr>
+        <p:txBody>
+          <a:bodyPr rtlCol="0" anchor="ctr"/>
+          <a:lstStyle/>
+          <a:p>
+            <a:pPr algn="ctr"/>
+          </a:p>
+        </p:txBody>
+      </p:sp>
+      <p:sp>
+        <p:nvSpPr>
           <p:cNvPr id="2" name="Title 1"/>
           <p:cNvSpPr>
             <a:spLocks noGrp="1"/>
@@ -3910,8 +4137,8 @@
         </p:nvSpPr>
         <p:spPr>
           <a:xfrm>
-            <a:off x="640080" y="411480"/>
-            <a:ext cx="8412242" cy="822960"/>
+            <a:off x="640080" y="502920"/>
+            <a:ext cx="10911535" cy="914400"/>
           </a:xfrm>
         </p:spPr>
         <p:txBody>
@@ -3928,7 +4155,7 @@
             <a:r>
               <a:rPr sz="3000" b="1" i="0">
                 <a:solidFill>
-                  <a:srgbClr val="FFFFFF"/>
+                  <a:srgbClr val="26231F"/>
                 </a:solidFill>
               </a:rPr>
               <a:t>우리의 이야기</a:t>
@@ -3938,20 +4165,20 @@
       </p:sp>
       <p:sp>
         <p:nvSpPr>
-          <p:cNvPr id="4" name="타임라인 선"/>
+          <p:cNvPr id="6" name="타임라인 선"/>
           <p:cNvSpPr/>
           <p:nvPr/>
         </p:nvSpPr>
         <p:spPr>
           <a:xfrm>
-            <a:off x="640080" y="3383280"/>
+            <a:off x="640080" y="3337560"/>
             <a:ext cx="10911535" cy="54864"/>
           </a:xfrm>
           <a:prstGeom prst="rect">
             <a:avLst/>
           </a:prstGeom>
           <a:solidFill>
-            <a:srgbClr val="EDDED4"/>
+            <a:srgbClr val="F6E2D5"/>
           </a:solidFill>
           <a:ln>
             <a:noFill/>
@@ -3967,20 +4194,20 @@
       </p:sp>
       <p:sp>
         <p:nvSpPr>
-          <p:cNvPr id="5" name="때 1"/>
+          <p:cNvPr id="7" name="때 1"/>
           <p:cNvSpPr/>
           <p:nvPr/>
         </p:nvSpPr>
         <p:spPr>
           <a:xfrm>
-            <a:off x="1802853" y="3200400"/>
+            <a:off x="1802853" y="3154680"/>
             <a:ext cx="402336" cy="402336"/>
           </a:xfrm>
           <a:prstGeom prst="ellipse">
             <a:avLst/>
           </a:prstGeom>
           <a:solidFill>
-            <a:srgbClr val="765037"/>
+            <a:srgbClr val="D89F79"/>
           </a:solidFill>
           <a:ln w="38100">
             <a:solidFill>
@@ -3998,13 +4225,13 @@
       </p:sp>
       <p:sp>
         <p:nvSpPr>
-          <p:cNvPr id="6" name="TextBox 5"/>
+          <p:cNvPr id="8" name="TextBox 7"/>
           <p:cNvSpPr txBox="1"/>
           <p:nvPr/>
         </p:nvSpPr>
         <p:spPr>
           <a:xfrm>
-            <a:off x="685800" y="2560320"/>
+            <a:off x="685800" y="2514600"/>
             <a:ext cx="2636443" cy="457200"/>
           </a:xfrm>
           <a:prstGeom prst="rect">
@@ -4026,7 +4253,7 @@
             <a:r>
               <a:rPr sz="1600" b="1" i="0">
                 <a:solidFill>
-                  <a:srgbClr val="765037"/>
+                  <a:srgbClr val="D89F79"/>
                 </a:solidFill>
               </a:rPr>
               <a:t>처음 만난 날</a:t>
@@ -4036,13 +4263,13 @@
       </p:sp>
       <p:sp>
         <p:nvSpPr>
-          <p:cNvPr id="7" name="TextBox 6"/>
+          <p:cNvPr id="9" name="TextBox 8"/>
           <p:cNvSpPr txBox="1"/>
           <p:nvPr/>
         </p:nvSpPr>
         <p:spPr>
           <a:xfrm>
-            <a:off x="731519" y="3749039"/>
+            <a:off x="731519" y="3703320"/>
             <a:ext cx="2545003" cy="457200"/>
           </a:xfrm>
           <a:prstGeom prst="rect">
@@ -4064,7 +4291,7 @@
             <a:r>
               <a:rPr sz="1800" b="1" i="0">
                 <a:solidFill>
-                  <a:srgbClr val="37261A"/>
+                  <a:srgbClr val="493527"/>
                 </a:solidFill>
               </a:rPr>
               <a:t>첫 만남</a:t>
@@ -4074,13 +4301,13 @@
       </p:sp>
       <p:sp>
         <p:nvSpPr>
-          <p:cNvPr id="8" name="TextBox 7"/>
+          <p:cNvPr id="10" name="TextBox 9"/>
           <p:cNvSpPr txBox="1"/>
           <p:nvPr/>
         </p:nvSpPr>
         <p:spPr>
           <a:xfrm>
-            <a:off x="731519" y="4251960"/>
+            <a:off x="731519" y="4206240"/>
             <a:ext cx="2545003" cy="1645920"/>
           </a:xfrm>
           <a:prstGeom prst="rect">
@@ -4102,7 +4329,7 @@
             <a:r>
               <a:rPr sz="1500" b="0" i="0">
                 <a:solidFill>
-                  <a:srgbClr val="2B2B2B"/>
+                  <a:srgbClr val="26231F"/>
                 </a:solidFill>
               </a:rPr>
               <a:t>어디에서 어떻게?</a:t>
@@ -4112,20 +4339,20 @@
       </p:sp>
       <p:sp>
         <p:nvSpPr>
-          <p:cNvPr id="9" name="때 2"/>
+          <p:cNvPr id="11" name="때 2"/>
           <p:cNvSpPr/>
           <p:nvPr/>
         </p:nvSpPr>
         <p:spPr>
           <a:xfrm>
-            <a:off x="4530737" y="3200400"/>
+            <a:off x="4530737" y="3154680"/>
             <a:ext cx="402336" cy="402336"/>
           </a:xfrm>
           <a:prstGeom prst="ellipse">
             <a:avLst/>
           </a:prstGeom>
           <a:solidFill>
-            <a:srgbClr val="765037"/>
+            <a:srgbClr val="D89F79"/>
           </a:solidFill>
           <a:ln w="38100">
             <a:solidFill>
@@ -4143,13 +4370,13 @@
       </p:sp>
       <p:sp>
         <p:nvSpPr>
-          <p:cNvPr id="10" name="TextBox 9"/>
+          <p:cNvPr id="12" name="TextBox 11"/>
           <p:cNvSpPr txBox="1"/>
           <p:nvPr/>
         </p:nvSpPr>
         <p:spPr>
           <a:xfrm>
-            <a:off x="3413683" y="2560320"/>
+            <a:off x="3413683" y="2514600"/>
             <a:ext cx="2636443" cy="457200"/>
           </a:xfrm>
           <a:prstGeom prst="rect">
@@ -4171,7 +4398,7 @@
             <a:r>
               <a:rPr sz="1600" b="1" i="0">
                 <a:solidFill>
-                  <a:srgbClr val="765037"/>
+                  <a:srgbClr val="D89F79"/>
                 </a:solidFill>
               </a:rPr>
               <a:t>첫 데이트</a:t>
@@ -4181,13 +4408,13 @@
       </p:sp>
       <p:sp>
         <p:nvSpPr>
-          <p:cNvPr id="11" name="TextBox 10"/>
+          <p:cNvPr id="13" name="TextBox 12"/>
           <p:cNvSpPr txBox="1"/>
           <p:nvPr/>
         </p:nvSpPr>
         <p:spPr>
           <a:xfrm>
-            <a:off x="3459403" y="3749039"/>
+            <a:off x="3459403" y="3703320"/>
             <a:ext cx="2545003" cy="457200"/>
           </a:xfrm>
           <a:prstGeom prst="rect">
@@ -4209,7 +4436,7 @@
             <a:r>
               <a:rPr sz="1800" b="1" i="0">
                 <a:solidFill>
-                  <a:srgbClr val="37261A"/>
+                  <a:srgbClr val="493527"/>
                 </a:solidFill>
               </a:rPr>
               <a:t>설레던 하루</a:t>
@@ -4219,13 +4446,13 @@
       </p:sp>
       <p:sp>
         <p:nvSpPr>
-          <p:cNvPr id="12" name="TextBox 11"/>
+          <p:cNvPr id="14" name="TextBox 13"/>
           <p:cNvSpPr txBox="1"/>
           <p:nvPr/>
         </p:nvSpPr>
         <p:spPr>
           <a:xfrm>
-            <a:off x="3459403" y="4251960"/>
+            <a:off x="3459403" y="4206240"/>
             <a:ext cx="2545003" cy="1645920"/>
           </a:xfrm>
           <a:prstGeom prst="rect">
@@ -4247,7 +4474,7 @@
             <a:r>
               <a:rPr sz="1500" b="0" i="0">
                 <a:solidFill>
-                  <a:srgbClr val="2B2B2B"/>
+                  <a:srgbClr val="26231F"/>
                 </a:solidFill>
               </a:rPr>
               <a:t>무엇을 했나요?</a:t>
@@ -4257,20 +4484,20 @@
       </p:sp>
       <p:sp>
         <p:nvSpPr>
-          <p:cNvPr id="13" name="때 3"/>
+          <p:cNvPr id="15" name="때 3"/>
           <p:cNvSpPr/>
           <p:nvPr/>
         </p:nvSpPr>
         <p:spPr>
           <a:xfrm>
-            <a:off x="7258621" y="3200400"/>
+            <a:off x="7258621" y="3154680"/>
             <a:ext cx="402336" cy="402336"/>
           </a:xfrm>
           <a:prstGeom prst="ellipse">
             <a:avLst/>
           </a:prstGeom>
           <a:solidFill>
-            <a:srgbClr val="765037"/>
+            <a:srgbClr val="D89F79"/>
           </a:solidFill>
           <a:ln w="38100">
             <a:solidFill>
@@ -4288,13 +4515,13 @@
       </p:sp>
       <p:sp>
         <p:nvSpPr>
-          <p:cNvPr id="14" name="TextBox 13"/>
+          <p:cNvPr id="16" name="TextBox 15"/>
           <p:cNvSpPr txBox="1"/>
           <p:nvPr/>
         </p:nvSpPr>
         <p:spPr>
           <a:xfrm>
-            <a:off x="6141567" y="2560320"/>
+            <a:off x="6141567" y="2514600"/>
             <a:ext cx="2636443" cy="457200"/>
           </a:xfrm>
           <a:prstGeom prst="rect">
@@ -4316,7 +4543,7 @@
             <a:r>
               <a:rPr sz="1600" b="1" i="0">
                 <a:solidFill>
-                  <a:srgbClr val="765037"/>
+                  <a:srgbClr val="D89F79"/>
                 </a:solidFill>
               </a:rPr>
               <a:t>프러포즈</a:t>
@@ -4326,13 +4553,13 @@
       </p:sp>
       <p:sp>
         <p:nvSpPr>
-          <p:cNvPr id="15" name="TextBox 14"/>
+          <p:cNvPr id="17" name="TextBox 16"/>
           <p:cNvSpPr txBox="1"/>
           <p:nvPr/>
         </p:nvSpPr>
         <p:spPr>
           <a:xfrm>
-            <a:off x="6187287" y="3749039"/>
+            <a:off x="6187287" y="3703320"/>
             <a:ext cx="2545003" cy="457200"/>
           </a:xfrm>
           <a:prstGeom prst="rect">
@@ -4354,7 +4581,7 @@
             <a:r>
               <a:rPr sz="1800" b="1" i="0">
                 <a:solidFill>
-                  <a:srgbClr val="37261A"/>
+                  <a:srgbClr val="493527"/>
                 </a:solidFill>
               </a:rPr>
               <a:t>평생을 약속하다</a:t>
@@ -4364,13 +4591,13 @@
       </p:sp>
       <p:sp>
         <p:nvSpPr>
-          <p:cNvPr id="16" name="TextBox 15"/>
+          <p:cNvPr id="18" name="TextBox 17"/>
           <p:cNvSpPr txBox="1"/>
           <p:nvPr/>
         </p:nvSpPr>
         <p:spPr>
           <a:xfrm>
-            <a:off x="6187287" y="4251960"/>
+            <a:off x="6187287" y="4206240"/>
             <a:ext cx="2545003" cy="1645920"/>
           </a:xfrm>
           <a:prstGeom prst="rect">
@@ -4392,7 +4619,7 @@
             <a:r>
               <a:rPr sz="1500" b="0" i="0">
                 <a:solidFill>
-                  <a:srgbClr val="2B2B2B"/>
+                  <a:srgbClr val="26231F"/>
                 </a:solidFill>
               </a:rPr>
               <a:t>그날의 이야기</a:t>
@@ -4402,20 +4629,20 @@
       </p:sp>
       <p:sp>
         <p:nvSpPr>
-          <p:cNvPr id="17" name="때 4"/>
+          <p:cNvPr id="19" name="때 4"/>
           <p:cNvSpPr/>
           <p:nvPr/>
         </p:nvSpPr>
         <p:spPr>
           <a:xfrm>
-            <a:off x="9986505" y="3200400"/>
+            <a:off x="9986505" y="3154680"/>
             <a:ext cx="402336" cy="402336"/>
           </a:xfrm>
           <a:prstGeom prst="ellipse">
             <a:avLst/>
           </a:prstGeom>
           <a:solidFill>
-            <a:srgbClr val="765037"/>
+            <a:srgbClr val="D89F79"/>
           </a:solidFill>
           <a:ln w="38100">
             <a:solidFill>
@@ -4433,13 +4660,13 @@
       </p:sp>
       <p:sp>
         <p:nvSpPr>
-          <p:cNvPr id="18" name="TextBox 17"/>
+          <p:cNvPr id="20" name="TextBox 19"/>
           <p:cNvSpPr txBox="1"/>
           <p:nvPr/>
         </p:nvSpPr>
         <p:spPr>
           <a:xfrm>
-            <a:off x="8869451" y="2560320"/>
+            <a:off x="8869451" y="2514600"/>
             <a:ext cx="2636443" cy="457200"/>
           </a:xfrm>
           <a:prstGeom prst="rect">
@@ -4461,7 +4688,7 @@
             <a:r>
               <a:rPr sz="1600" b="1" i="0">
                 <a:solidFill>
-                  <a:srgbClr val="765037"/>
+                  <a:srgbClr val="D89F79"/>
                 </a:solidFill>
               </a:rPr>
               <a:t>결혼</a:t>
@@ -4471,13 +4698,13 @@
       </p:sp>
       <p:sp>
         <p:nvSpPr>
-          <p:cNvPr id="19" name="TextBox 18"/>
+          <p:cNvPr id="21" name="TextBox 20"/>
           <p:cNvSpPr txBox="1"/>
           <p:nvPr/>
         </p:nvSpPr>
         <p:spPr>
           <a:xfrm>
-            <a:off x="8915171" y="3749039"/>
+            <a:off x="8915171" y="3703320"/>
             <a:ext cx="2545003" cy="457200"/>
           </a:xfrm>
           <a:prstGeom prst="rect">
@@ -4499,7 +4726,7 @@
             <a:r>
               <a:rPr sz="1800" b="1" i="0">
                 <a:solidFill>
-                  <a:srgbClr val="37261A"/>
+                  <a:srgbClr val="493527"/>
                 </a:solidFill>
               </a:rPr>
               <a:t>오늘의 우리</a:t>
@@ -4509,13 +4736,13 @@
       </p:sp>
       <p:sp>
         <p:nvSpPr>
-          <p:cNvPr id="20" name="TextBox 19"/>
+          <p:cNvPr id="22" name="TextBox 21"/>
           <p:cNvSpPr txBox="1"/>
           <p:nvPr/>
         </p:nvSpPr>
         <p:spPr>
           <a:xfrm>
-            <a:off x="8915171" y="4251960"/>
+            <a:off x="8915171" y="4206240"/>
             <a:ext cx="2545003" cy="1645920"/>
           </a:xfrm>
           <a:prstGeom prst="rect">
@@ -4537,7 +4764,7 @@
             <a:r>
               <a:rPr sz="1500" b="0" i="0">
                 <a:solidFill>
-                  <a:srgbClr val="2B2B2B"/>
+                  <a:srgbClr val="26231F"/>
                 </a:solidFill>
               </a:rPr>
               <a:t>함께 시작합니다</a:t>
@@ -4559,7 +4786,7 @@
     <p:bg>
       <p:bgPr>
         <a:solidFill>
-          <a:srgbClr val="FFFFFF"/>
+          <a:srgbClr val="FBF2EC"/>
         </a:solidFill>
         <a:effectLst/>
       </p:bgPr>
@@ -4579,14 +4806,14 @@
         </p:nvSpPr>
         <p:spPr>
           <a:xfrm>
-            <a:off x="0" y="384048"/>
-            <a:ext cx="9509522" cy="896112"/>
-          </a:xfrm>
-          <a:prstGeom prst="homePlate">
+            <a:off x="640080" y="6400800"/>
+            <a:ext cx="10911535" cy="10972"/>
+          </a:xfrm>
+          <a:prstGeom prst="rect">
             <a:avLst/>
           </a:prstGeom>
           <a:solidFill>
-            <a:srgbClr val="765037"/>
+            <a:srgbClr val="26231F"/>
           </a:solidFill>
           <a:ln>
             <a:noFill/>
@@ -4602,6 +4829,73 @@
       </p:sp>
       <p:sp>
         <p:nvSpPr>
+          <p:cNvPr id="4" name="하단 라벨"/>
+          <p:cNvSpPr txBox="1"/>
+          <p:nvPr/>
+        </p:nvSpPr>
+        <p:spPr>
+          <a:xfrm>
+            <a:off x="640080" y="6437376"/>
+            <a:ext cx="5486400" cy="274320"/>
+          </a:xfrm>
+          <a:prstGeom prst="rect">
+            <a:avLst/>
+          </a:prstGeom>
+          <a:noFill/>
+        </p:spPr>
+        <p:txBody>
+          <a:bodyPr wrap="square" lIns="54864" rIns="54864" tIns="27432" bIns="27432" anchor="ctr">
+            <a:noAutofit/>
+          </a:bodyPr>
+          <a:lstStyle/>
+          <a:p>
+            <a:pPr algn="l">
+              <a:lnSpc>
+                <a:spcPct val="115000"/>
+              </a:lnSpc>
+            </a:pPr>
+            <a:r>
+              <a:rPr sz="900" b="1" i="0" spc="250">
+                <a:solidFill>
+                  <a:srgbClr val="26231F"/>
+                </a:solidFill>
+              </a:rPr>
+              <a:t>WEDDING</a:t>
+            </a:r>
+          </a:p>
+        </p:txBody>
+      </p:sp>
+      <p:sp>
+        <p:nvSpPr>
+          <p:cNvPr id="5" name="포인트"/>
+          <p:cNvSpPr/>
+          <p:nvPr/>
+        </p:nvSpPr>
+        <p:spPr>
+          <a:xfrm>
+            <a:off x="11213287" y="6473952"/>
+            <a:ext cx="219456" cy="219456"/>
+          </a:xfrm>
+          <a:prstGeom prst="round2SameRect">
+            <a:avLst/>
+          </a:prstGeom>
+          <a:solidFill>
+            <a:srgbClr val="D89F79"/>
+          </a:solidFill>
+          <a:ln>
+            <a:noFill/>
+          </a:ln>
+        </p:spPr>
+        <p:txBody>
+          <a:bodyPr rtlCol="0" anchor="ctr"/>
+          <a:lstStyle/>
+          <a:p>
+            <a:pPr algn="ctr"/>
+          </a:p>
+        </p:txBody>
+      </p:sp>
+      <p:sp>
+        <p:nvSpPr>
           <p:cNvPr id="2" name="Title 1"/>
           <p:cNvSpPr>
             <a:spLocks noGrp="1"/>
@@ -4612,8 +4906,8 @@
         </p:nvSpPr>
         <p:spPr>
           <a:xfrm>
-            <a:off x="640080" y="411480"/>
-            <a:ext cx="8412242" cy="822960"/>
+            <a:off x="640080" y="502920"/>
+            <a:ext cx="10911535" cy="914400"/>
           </a:xfrm>
         </p:spPr>
         <p:txBody>
@@ -4630,7 +4924,7 @@
             <a:r>
               <a:rPr sz="3000" b="1" i="0">
                 <a:solidFill>
-                  <a:srgbClr val="FFFFFF"/>
+                  <a:srgbClr val="26231F"/>
                 </a:solidFill>
               </a:rPr>
               <a:t>우리의 첫 번째</a:t>
@@ -4640,26 +4934,26 @@
       </p:sp>
       <p:sp>
         <p:nvSpPr>
-          <p:cNvPr id="4" name="카드 1"/>
+          <p:cNvPr id="6" name="카드 1"/>
           <p:cNvSpPr/>
           <p:nvPr/>
         </p:nvSpPr>
         <p:spPr>
           <a:xfrm>
-            <a:off x="640080" y="1645920"/>
-            <a:ext cx="2556433" cy="4754880"/>
+            <a:off x="640080" y="1600200"/>
+            <a:ext cx="2556433" cy="4572000"/>
           </a:xfrm>
           <a:prstGeom prst="roundRect">
             <a:avLst>
-              <a:gd name="adj" fmla="val 8000"/>
+              <a:gd name="adj" fmla="val 3000"/>
             </a:avLst>
           </a:prstGeom>
           <a:solidFill>
-            <a:srgbClr val="F8F4F1"/>
+            <a:srgbClr val="FFFFFF"/>
           </a:solidFill>
-          <a:ln w="15875">
+          <a:ln w="9525">
             <a:solidFill>
-              <a:srgbClr val="EDDED4"/>
+              <a:srgbClr val="F6E2D5"/>
             </a:solidFill>
           </a:ln>
         </p:spPr>
@@ -4673,20 +4967,51 @@
       </p:sp>
       <p:sp>
         <p:nvSpPr>
-          <p:cNvPr id="5" name="번호 1"/>
+          <p:cNvPr id="7" name="위쪽 띠"/>
           <p:cNvSpPr/>
           <p:nvPr/>
         </p:nvSpPr>
         <p:spPr>
           <a:xfrm>
-            <a:off x="822959" y="1828800"/>
+            <a:off x="649224" y="1609344"/>
+            <a:ext cx="2538145" cy="82296"/>
+          </a:xfrm>
+          <a:prstGeom prst="rect">
+            <a:avLst/>
+          </a:prstGeom>
+          <a:solidFill>
+            <a:srgbClr val="D89F79"/>
+          </a:solidFill>
+          <a:ln>
+            <a:noFill/>
+          </a:ln>
+        </p:spPr>
+        <p:txBody>
+          <a:bodyPr rtlCol="0" anchor="ctr"/>
+          <a:lstStyle/>
+          <a:p>
+            <a:pPr algn="ctr"/>
+          </a:p>
+        </p:txBody>
+      </p:sp>
+      <p:sp>
+        <p:nvSpPr>
+          <p:cNvPr id="8" name="번호 1"/>
+          <p:cNvSpPr/>
+          <p:nvPr/>
+        </p:nvSpPr>
+        <p:spPr>
+          <a:xfrm>
+            <a:off x="822959" y="1783080"/>
             <a:ext cx="457200" cy="457200"/>
           </a:xfrm>
-          <a:prstGeom prst="ellipse">
-            <a:avLst/>
+          <a:prstGeom prst="roundRect">
+            <a:avLst>
+              <a:gd name="adj" fmla="val 25000"/>
+            </a:avLst>
           </a:prstGeom>
           <a:solidFill>
-            <a:srgbClr val="765037"/>
+            <a:srgbClr val="D89F79"/>
           </a:solidFill>
           <a:ln>
             <a:noFill/>
@@ -4706,7 +5031,7 @@
             <a:r>
               <a:rPr sz="1600" b="1" i="0">
                 <a:solidFill>
-                  <a:srgbClr val="FFFFFF"/>
+                  <a:srgbClr val="26231F"/>
                 </a:solidFill>
               </a:rPr>
               <a:t>1</a:t>
@@ -4716,13 +5041,13 @@
       </p:sp>
       <p:sp>
         <p:nvSpPr>
-          <p:cNvPr id="6" name="TextBox 5"/>
+          <p:cNvPr id="9" name="TextBox 8"/>
           <p:cNvSpPr txBox="1"/>
           <p:nvPr/>
         </p:nvSpPr>
         <p:spPr>
           <a:xfrm>
-            <a:off x="777240" y="2423160"/>
+            <a:off x="777240" y="2377440"/>
             <a:ext cx="2282113" cy="640080"/>
           </a:xfrm>
           <a:prstGeom prst="rect">
@@ -4744,7 +5069,7 @@
             <a:r>
               <a:rPr sz="1800" b="1" i="0">
                 <a:solidFill>
-                  <a:srgbClr val="37261A"/>
+                  <a:srgbClr val="493527"/>
                 </a:solidFill>
               </a:rPr>
               <a:t>첫 여행</a:t>
@@ -4754,14 +5079,14 @@
       </p:sp>
       <p:sp>
         <p:nvSpPr>
-          <p:cNvPr id="7" name="TextBox 6"/>
+          <p:cNvPr id="10" name="TextBox 9"/>
           <p:cNvSpPr txBox="1"/>
           <p:nvPr/>
         </p:nvSpPr>
         <p:spPr>
           <a:xfrm>
-            <a:off x="777240" y="3108960"/>
-            <a:ext cx="2282113" cy="3154679"/>
+            <a:off x="777240" y="3063240"/>
+            <a:ext cx="2282113" cy="2971800"/>
           </a:xfrm>
           <a:prstGeom prst="rect">
             <a:avLst/>
@@ -4782,7 +5107,7 @@
             <a:r>
               <a:rPr sz="1500" b="0" i="0">
                 <a:solidFill>
-                  <a:srgbClr val="2B2B2B"/>
+                  <a:srgbClr val="26231F"/>
                 </a:solidFill>
               </a:rPr>
               <a:t>어디였나요?</a:t>
@@ -4792,26 +5117,26 @@
       </p:sp>
       <p:sp>
         <p:nvSpPr>
-          <p:cNvPr id="8" name="카드 2"/>
+          <p:cNvPr id="11" name="카드 2"/>
           <p:cNvSpPr/>
           <p:nvPr/>
         </p:nvSpPr>
         <p:spPr>
           <a:xfrm>
-            <a:off x="3425113" y="1645920"/>
-            <a:ext cx="2556433" cy="4754880"/>
+            <a:off x="3425113" y="1600200"/>
+            <a:ext cx="2556433" cy="4572000"/>
           </a:xfrm>
           <a:prstGeom prst="roundRect">
             <a:avLst>
-              <a:gd name="adj" fmla="val 8000"/>
+              <a:gd name="adj" fmla="val 3000"/>
             </a:avLst>
           </a:prstGeom>
           <a:solidFill>
-            <a:srgbClr val="F8F4F1"/>
+            <a:srgbClr val="FFFFFF"/>
           </a:solidFill>
-          <a:ln w="15875">
+          <a:ln w="9525">
             <a:solidFill>
-              <a:srgbClr val="EDDED4"/>
+              <a:srgbClr val="F6E2D5"/>
             </a:solidFill>
           </a:ln>
         </p:spPr>
@@ -4825,20 +5150,51 @@
       </p:sp>
       <p:sp>
         <p:nvSpPr>
-          <p:cNvPr id="9" name="번호 2"/>
+          <p:cNvPr id="12" name="위쪽 띠"/>
           <p:cNvSpPr/>
           <p:nvPr/>
         </p:nvSpPr>
         <p:spPr>
           <a:xfrm>
-            <a:off x="3607993" y="1828800"/>
+            <a:off x="3434257" y="1609344"/>
+            <a:ext cx="2538145" cy="82296"/>
+          </a:xfrm>
+          <a:prstGeom prst="rect">
+            <a:avLst/>
+          </a:prstGeom>
+          <a:solidFill>
+            <a:srgbClr val="D89F79"/>
+          </a:solidFill>
+          <a:ln>
+            <a:noFill/>
+          </a:ln>
+        </p:spPr>
+        <p:txBody>
+          <a:bodyPr rtlCol="0" anchor="ctr"/>
+          <a:lstStyle/>
+          <a:p>
+            <a:pPr algn="ctr"/>
+          </a:p>
+        </p:txBody>
+      </p:sp>
+      <p:sp>
+        <p:nvSpPr>
+          <p:cNvPr id="13" name="번호 2"/>
+          <p:cNvSpPr/>
+          <p:nvPr/>
+        </p:nvSpPr>
+        <p:spPr>
+          <a:xfrm>
+            <a:off x="3607993" y="1783080"/>
             <a:ext cx="457200" cy="457200"/>
           </a:xfrm>
-          <a:prstGeom prst="ellipse">
-            <a:avLst/>
+          <a:prstGeom prst="roundRect">
+            <a:avLst>
+              <a:gd name="adj" fmla="val 25000"/>
+            </a:avLst>
           </a:prstGeom>
           <a:solidFill>
-            <a:srgbClr val="765037"/>
+            <a:srgbClr val="D89F79"/>
           </a:solidFill>
           <a:ln>
             <a:noFill/>
@@ -4858,7 +5214,7 @@
             <a:r>
               <a:rPr sz="1600" b="1" i="0">
                 <a:solidFill>
-                  <a:srgbClr val="FFFFFF"/>
+                  <a:srgbClr val="26231F"/>
                 </a:solidFill>
               </a:rPr>
               <a:t>2</a:t>
@@ -4868,13 +5224,13 @@
       </p:sp>
       <p:sp>
         <p:nvSpPr>
-          <p:cNvPr id="10" name="TextBox 9"/>
+          <p:cNvPr id="14" name="TextBox 13"/>
           <p:cNvSpPr txBox="1"/>
           <p:nvPr/>
         </p:nvSpPr>
         <p:spPr>
           <a:xfrm>
-            <a:off x="3562273" y="2423160"/>
+            <a:off x="3562273" y="2377440"/>
             <a:ext cx="2282113" cy="640080"/>
           </a:xfrm>
           <a:prstGeom prst="rect">
@@ -4896,7 +5252,7 @@
             <a:r>
               <a:rPr sz="1800" b="1" i="0">
                 <a:solidFill>
-                  <a:srgbClr val="37261A"/>
+                  <a:srgbClr val="493527"/>
                 </a:solidFill>
               </a:rPr>
               <a:t>첫 선물</a:t>
@@ -4906,14 +5262,14 @@
       </p:sp>
       <p:sp>
         <p:nvSpPr>
-          <p:cNvPr id="11" name="TextBox 10"/>
+          <p:cNvPr id="15" name="TextBox 14"/>
           <p:cNvSpPr txBox="1"/>
           <p:nvPr/>
         </p:nvSpPr>
         <p:spPr>
           <a:xfrm>
-            <a:off x="3562273" y="3108960"/>
-            <a:ext cx="2282113" cy="3154679"/>
+            <a:off x="3562273" y="3063240"/>
+            <a:ext cx="2282113" cy="2971800"/>
           </a:xfrm>
           <a:prstGeom prst="rect">
             <a:avLst/>
@@ -4934,7 +5290,7 @@
             <a:r>
               <a:rPr sz="1500" b="0" i="0">
                 <a:solidFill>
-                  <a:srgbClr val="2B2B2B"/>
+                  <a:srgbClr val="26231F"/>
                 </a:solidFill>
               </a:rPr>
               <a:t>무엇이었나요?</a:t>
@@ -4944,26 +5300,26 @@
       </p:sp>
       <p:sp>
         <p:nvSpPr>
-          <p:cNvPr id="12" name="카드 3"/>
+          <p:cNvPr id="16" name="카드 3"/>
           <p:cNvSpPr/>
           <p:nvPr/>
         </p:nvSpPr>
         <p:spPr>
           <a:xfrm>
-            <a:off x="6210147" y="1645920"/>
-            <a:ext cx="2556433" cy="4754880"/>
+            <a:off x="6210147" y="1600200"/>
+            <a:ext cx="2556433" cy="4572000"/>
           </a:xfrm>
           <a:prstGeom prst="roundRect">
             <a:avLst>
-              <a:gd name="adj" fmla="val 8000"/>
+              <a:gd name="adj" fmla="val 3000"/>
             </a:avLst>
           </a:prstGeom>
           <a:solidFill>
-            <a:srgbClr val="F8F4F1"/>
+            <a:srgbClr val="FFFFFF"/>
           </a:solidFill>
-          <a:ln w="15875">
+          <a:ln w="9525">
             <a:solidFill>
-              <a:srgbClr val="EDDED4"/>
+              <a:srgbClr val="F6E2D5"/>
             </a:solidFill>
           </a:ln>
         </p:spPr>
@@ -4977,20 +5333,51 @@
       </p:sp>
       <p:sp>
         <p:nvSpPr>
-          <p:cNvPr id="13" name="번호 3"/>
+          <p:cNvPr id="17" name="위쪽 띠"/>
           <p:cNvSpPr/>
           <p:nvPr/>
         </p:nvSpPr>
         <p:spPr>
           <a:xfrm>
-            <a:off x="6393027" y="1828800"/>
+            <a:off x="6219291" y="1609344"/>
+            <a:ext cx="2538145" cy="82296"/>
+          </a:xfrm>
+          <a:prstGeom prst="rect">
+            <a:avLst/>
+          </a:prstGeom>
+          <a:solidFill>
+            <a:srgbClr val="D89F79"/>
+          </a:solidFill>
+          <a:ln>
+            <a:noFill/>
+          </a:ln>
+        </p:spPr>
+        <p:txBody>
+          <a:bodyPr rtlCol="0" anchor="ctr"/>
+          <a:lstStyle/>
+          <a:p>
+            <a:pPr algn="ctr"/>
+          </a:p>
+        </p:txBody>
+      </p:sp>
+      <p:sp>
+        <p:nvSpPr>
+          <p:cNvPr id="18" name="번호 3"/>
+          <p:cNvSpPr/>
+          <p:nvPr/>
+        </p:nvSpPr>
+        <p:spPr>
+          <a:xfrm>
+            <a:off x="6393027" y="1783080"/>
             <a:ext cx="457200" cy="457200"/>
           </a:xfrm>
-          <a:prstGeom prst="ellipse">
-            <a:avLst/>
+          <a:prstGeom prst="roundRect">
+            <a:avLst>
+              <a:gd name="adj" fmla="val 25000"/>
+            </a:avLst>
           </a:prstGeom>
           <a:solidFill>
-            <a:srgbClr val="765037"/>
+            <a:srgbClr val="D89F79"/>
           </a:solidFill>
           <a:ln>
             <a:noFill/>
@@ -5010,7 +5397,7 @@
             <a:r>
               <a:rPr sz="1600" b="1" i="0">
                 <a:solidFill>
-                  <a:srgbClr val="FFFFFF"/>
+                  <a:srgbClr val="26231F"/>
                 </a:solidFill>
               </a:rPr>
               <a:t>3</a:t>
@@ -5020,13 +5407,13 @@
       </p:sp>
       <p:sp>
         <p:nvSpPr>
-          <p:cNvPr id="14" name="TextBox 13"/>
+          <p:cNvPr id="19" name="TextBox 18"/>
           <p:cNvSpPr txBox="1"/>
           <p:nvPr/>
         </p:nvSpPr>
         <p:spPr>
           <a:xfrm>
-            <a:off x="6347307" y="2423160"/>
+            <a:off x="6347307" y="2377440"/>
             <a:ext cx="2282113" cy="640080"/>
           </a:xfrm>
           <a:prstGeom prst="rect">
@@ -5048,7 +5435,7 @@
             <a:r>
               <a:rPr sz="1800" b="1" i="0">
                 <a:solidFill>
-                  <a:srgbClr val="37261A"/>
+                  <a:srgbClr val="493527"/>
                 </a:solidFill>
               </a:rPr>
               <a:t>첫 다툼</a:t>
@@ -5058,14 +5445,14 @@
       </p:sp>
       <p:sp>
         <p:nvSpPr>
-          <p:cNvPr id="15" name="TextBox 14"/>
+          <p:cNvPr id="20" name="TextBox 19"/>
           <p:cNvSpPr txBox="1"/>
           <p:nvPr/>
         </p:nvSpPr>
         <p:spPr>
           <a:xfrm>
-            <a:off x="6347307" y="3108960"/>
-            <a:ext cx="2282113" cy="3154679"/>
+            <a:off x="6347307" y="3063240"/>
+            <a:ext cx="2282113" cy="2971800"/>
           </a:xfrm>
           <a:prstGeom prst="rect">
             <a:avLst/>
@@ -5086,7 +5473,7 @@
             <a:r>
               <a:rPr sz="1500" b="0" i="0">
                 <a:solidFill>
-                  <a:srgbClr val="2B2B2B"/>
+                  <a:srgbClr val="26231F"/>
                 </a:solidFill>
               </a:rPr>
               <a:t>어떻게 풀었나요?</a:t>
@@ -5096,26 +5483,26 @@
       </p:sp>
       <p:sp>
         <p:nvSpPr>
-          <p:cNvPr id="16" name="카드 4"/>
+          <p:cNvPr id="21" name="카드 4"/>
           <p:cNvSpPr/>
           <p:nvPr/>
         </p:nvSpPr>
         <p:spPr>
           <a:xfrm>
-            <a:off x="8995181" y="1645920"/>
-            <a:ext cx="2556433" cy="4754880"/>
+            <a:off x="8995181" y="1600200"/>
+            <a:ext cx="2556433" cy="4572000"/>
           </a:xfrm>
           <a:prstGeom prst="roundRect">
             <a:avLst>
-              <a:gd name="adj" fmla="val 8000"/>
+              <a:gd name="adj" fmla="val 3000"/>
             </a:avLst>
           </a:prstGeom>
           <a:solidFill>
-            <a:srgbClr val="F8F4F1"/>
+            <a:srgbClr val="FFFFFF"/>
           </a:solidFill>
-          <a:ln w="15875">
+          <a:ln w="9525">
             <a:solidFill>
-              <a:srgbClr val="EDDED4"/>
+              <a:srgbClr val="F6E2D5"/>
             </a:solidFill>
           </a:ln>
         </p:spPr>
@@ -5129,20 +5516,51 @@
       </p:sp>
       <p:sp>
         <p:nvSpPr>
-          <p:cNvPr id="17" name="번호 4"/>
+          <p:cNvPr id="22" name="위쪽 띠"/>
           <p:cNvSpPr/>
           <p:nvPr/>
         </p:nvSpPr>
         <p:spPr>
           <a:xfrm>
-            <a:off x="9178061" y="1828800"/>
+            <a:off x="9004325" y="1609344"/>
+            <a:ext cx="2538145" cy="82296"/>
+          </a:xfrm>
+          <a:prstGeom prst="rect">
+            <a:avLst/>
+          </a:prstGeom>
+          <a:solidFill>
+            <a:srgbClr val="D89F79"/>
+          </a:solidFill>
+          <a:ln>
+            <a:noFill/>
+          </a:ln>
+        </p:spPr>
+        <p:txBody>
+          <a:bodyPr rtlCol="0" anchor="ctr"/>
+          <a:lstStyle/>
+          <a:p>
+            <a:pPr algn="ctr"/>
+          </a:p>
+        </p:txBody>
+      </p:sp>
+      <p:sp>
+        <p:nvSpPr>
+          <p:cNvPr id="23" name="번호 4"/>
+          <p:cNvSpPr/>
+          <p:nvPr/>
+        </p:nvSpPr>
+        <p:spPr>
+          <a:xfrm>
+            <a:off x="9178061" y="1783080"/>
             <a:ext cx="457200" cy="457200"/>
           </a:xfrm>
-          <a:prstGeom prst="ellipse">
-            <a:avLst/>
+          <a:prstGeom prst="roundRect">
+            <a:avLst>
+              <a:gd name="adj" fmla="val 25000"/>
+            </a:avLst>
           </a:prstGeom>
           <a:solidFill>
-            <a:srgbClr val="765037"/>
+            <a:srgbClr val="D89F79"/>
           </a:solidFill>
           <a:ln>
             <a:noFill/>
@@ -5162,7 +5580,7 @@
             <a:r>
               <a:rPr sz="1600" b="1" i="0">
                 <a:solidFill>
-                  <a:srgbClr val="FFFFFF"/>
+                  <a:srgbClr val="26231F"/>
                 </a:solidFill>
               </a:rPr>
               <a:t>4</a:t>
@@ -5172,13 +5590,13 @@
       </p:sp>
       <p:sp>
         <p:nvSpPr>
-          <p:cNvPr id="18" name="TextBox 17"/>
+          <p:cNvPr id="24" name="TextBox 23"/>
           <p:cNvSpPr txBox="1"/>
           <p:nvPr/>
         </p:nvSpPr>
         <p:spPr>
           <a:xfrm>
-            <a:off x="9132341" y="2423160"/>
+            <a:off x="9132341" y="2377440"/>
             <a:ext cx="2282113" cy="640080"/>
           </a:xfrm>
           <a:prstGeom prst="rect">
@@ -5200,7 +5618,7 @@
             <a:r>
               <a:rPr sz="1800" b="1" i="0">
                 <a:solidFill>
-                  <a:srgbClr val="37261A"/>
+                  <a:srgbClr val="493527"/>
                 </a:solidFill>
               </a:rPr>
               <a:t>첫 약속</a:t>
@@ -5210,14 +5628,14 @@
       </p:sp>
       <p:sp>
         <p:nvSpPr>
-          <p:cNvPr id="19" name="TextBox 18"/>
+          <p:cNvPr id="25" name="TextBox 24"/>
           <p:cNvSpPr txBox="1"/>
           <p:nvPr/>
         </p:nvSpPr>
         <p:spPr>
           <a:xfrm>
-            <a:off x="9132341" y="3108960"/>
-            <a:ext cx="2282113" cy="3154679"/>
+            <a:off x="9132341" y="3063240"/>
+            <a:ext cx="2282113" cy="2971800"/>
           </a:xfrm>
           <a:prstGeom prst="rect">
             <a:avLst/>
@@ -5238,7 +5656,7 @@
             <a:r>
               <a:rPr sz="1500" b="0" i="0">
                 <a:solidFill>
-                  <a:srgbClr val="2B2B2B"/>
+                  <a:srgbClr val="26231F"/>
                 </a:solidFill>
               </a:rPr>
               <a:t>무엇이었나요?</a:t>
@@ -5260,7 +5678,7 @@
     <p:bg>
       <p:bgPr>
         <a:solidFill>
-          <a:srgbClr val="FFFFFF"/>
+          <a:srgbClr val="FBF2EC"/>
         </a:solidFill>
         <a:effectLst/>
       </p:bgPr>
@@ -5280,14 +5698,14 @@
         </p:nvSpPr>
         <p:spPr>
           <a:xfrm>
-            <a:off x="0" y="384048"/>
-            <a:ext cx="9509522" cy="896112"/>
-          </a:xfrm>
-          <a:prstGeom prst="homePlate">
+            <a:off x="640080" y="6400800"/>
+            <a:ext cx="10911535" cy="10972"/>
+          </a:xfrm>
+          <a:prstGeom prst="rect">
             <a:avLst/>
           </a:prstGeom>
           <a:solidFill>
-            <a:srgbClr val="765037"/>
+            <a:srgbClr val="26231F"/>
           </a:solidFill>
           <a:ln>
             <a:noFill/>
@@ -5303,6 +5721,73 @@
       </p:sp>
       <p:sp>
         <p:nvSpPr>
+          <p:cNvPr id="4" name="하단 라벨"/>
+          <p:cNvSpPr txBox="1"/>
+          <p:nvPr/>
+        </p:nvSpPr>
+        <p:spPr>
+          <a:xfrm>
+            <a:off x="640080" y="6437376"/>
+            <a:ext cx="5486400" cy="274320"/>
+          </a:xfrm>
+          <a:prstGeom prst="rect">
+            <a:avLst/>
+          </a:prstGeom>
+          <a:noFill/>
+        </p:spPr>
+        <p:txBody>
+          <a:bodyPr wrap="square" lIns="54864" rIns="54864" tIns="27432" bIns="27432" anchor="ctr">
+            <a:noAutofit/>
+          </a:bodyPr>
+          <a:lstStyle/>
+          <a:p>
+            <a:pPr algn="l">
+              <a:lnSpc>
+                <a:spcPct val="115000"/>
+              </a:lnSpc>
+            </a:pPr>
+            <a:r>
+              <a:rPr sz="900" b="1" i="0" spc="250">
+                <a:solidFill>
+                  <a:srgbClr val="26231F"/>
+                </a:solidFill>
+              </a:rPr>
+              <a:t>WEDDING</a:t>
+            </a:r>
+          </a:p>
+        </p:txBody>
+      </p:sp>
+      <p:sp>
+        <p:nvSpPr>
+          <p:cNvPr id="5" name="포인트"/>
+          <p:cNvSpPr/>
+          <p:nvPr/>
+        </p:nvSpPr>
+        <p:spPr>
+          <a:xfrm>
+            <a:off x="11213287" y="6473952"/>
+            <a:ext cx="219456" cy="219456"/>
+          </a:xfrm>
+          <a:prstGeom prst="round2SameRect">
+            <a:avLst/>
+          </a:prstGeom>
+          <a:solidFill>
+            <a:srgbClr val="D89F79"/>
+          </a:solidFill>
+          <a:ln>
+            <a:noFill/>
+          </a:ln>
+        </p:spPr>
+        <p:txBody>
+          <a:bodyPr rtlCol="0" anchor="ctr"/>
+          <a:lstStyle/>
+          <a:p>
+            <a:pPr algn="ctr"/>
+          </a:p>
+        </p:txBody>
+      </p:sp>
+      <p:sp>
+        <p:nvSpPr>
           <p:cNvPr id="2" name="Title 1"/>
           <p:cNvSpPr>
             <a:spLocks noGrp="1"/>
@@ -5313,8 +5798,8 @@
         </p:nvSpPr>
         <p:spPr>
           <a:xfrm>
-            <a:off x="640080" y="411480"/>
-            <a:ext cx="8412242" cy="822960"/>
+            <a:off x="640080" y="502920"/>
+            <a:ext cx="10911535" cy="914400"/>
           </a:xfrm>
         </p:spPr>
         <p:txBody>
@@ -5331,7 +5816,7 @@
             <a:r>
               <a:rPr sz="3000" b="1" i="0">
                 <a:solidFill>
-                  <a:srgbClr val="FFFFFF"/>
+                  <a:srgbClr val="26231F"/>
                 </a:solidFill>
               </a:rPr>
               <a:t>웨딩 사진</a:t>
@@ -5341,14 +5826,14 @@
       </p:sp>
       <p:sp>
         <p:nvSpPr>
-          <p:cNvPr id="4" name="사진 자리"/>
+          <p:cNvPr id="6" name="사진 자리"/>
           <p:cNvSpPr/>
           <p:nvPr/>
         </p:nvSpPr>
         <p:spPr>
           <a:xfrm>
-            <a:off x="640080" y="1645920"/>
-            <a:ext cx="3515258" cy="2286000"/>
+            <a:off x="640080" y="1600200"/>
+            <a:ext cx="3515258" cy="2194560"/>
           </a:xfrm>
           <a:prstGeom prst="roundRect">
             <a:avLst>
@@ -5356,12 +5841,10 @@
             </a:avLst>
           </a:prstGeom>
           <a:solidFill>
-            <a:srgbClr val="EDDED4"/>
+            <a:srgbClr val="F6E2D5"/>
           </a:solidFill>
           <a:ln w="19050">
-            <a:solidFill>
-              <a:srgbClr val="765037"/>
-            </a:solidFill>
+            <a:noFill/>
             <a:prstDash val="dash"/>
           </a:ln>
         </p:spPr>
@@ -5379,7 +5862,7 @@
             <a:r>
               <a:rPr sz="1200" b="0" i="0">
                 <a:solidFill>
-                  <a:srgbClr val="37261A"/>
+                  <a:srgbClr val="8E8780"/>
                 </a:solidFill>
               </a:rPr>
               <a:t>사진 1</a:t>
@@ -5389,14 +5872,14 @@
       </p:sp>
       <p:sp>
         <p:nvSpPr>
-          <p:cNvPr id="5" name="사진 자리"/>
+          <p:cNvPr id="7" name="사진 자리"/>
           <p:cNvSpPr/>
           <p:nvPr/>
         </p:nvSpPr>
         <p:spPr>
           <a:xfrm>
-            <a:off x="4338218" y="1645920"/>
-            <a:ext cx="3515258" cy="2286000"/>
+            <a:off x="4338218" y="1600200"/>
+            <a:ext cx="3515258" cy="2194560"/>
           </a:xfrm>
           <a:prstGeom prst="roundRect">
             <a:avLst>
@@ -5404,12 +5887,10 @@
             </a:avLst>
           </a:prstGeom>
           <a:solidFill>
-            <a:srgbClr val="EDDED4"/>
+            <a:srgbClr val="F6E2D5"/>
           </a:solidFill>
           <a:ln w="19050">
-            <a:solidFill>
-              <a:srgbClr val="765037"/>
-            </a:solidFill>
+            <a:noFill/>
             <a:prstDash val="dash"/>
           </a:ln>
         </p:spPr>
@@ -5427,7 +5908,7 @@
             <a:r>
               <a:rPr sz="1200" b="0" i="0">
                 <a:solidFill>
-                  <a:srgbClr val="37261A"/>
+                  <a:srgbClr val="8E8780"/>
                 </a:solidFill>
               </a:rPr>
               <a:t>사진 2</a:t>
@@ -5437,14 +5918,14 @@
       </p:sp>
       <p:sp>
         <p:nvSpPr>
-          <p:cNvPr id="6" name="사진 자리"/>
+          <p:cNvPr id="8" name="사진 자리"/>
           <p:cNvSpPr/>
           <p:nvPr/>
         </p:nvSpPr>
         <p:spPr>
           <a:xfrm>
-            <a:off x="8036356" y="1645920"/>
-            <a:ext cx="3515258" cy="2286000"/>
+            <a:off x="8036356" y="1600200"/>
+            <a:ext cx="3515258" cy="2194560"/>
           </a:xfrm>
           <a:prstGeom prst="roundRect">
             <a:avLst>
@@ -5452,12 +5933,10 @@
             </a:avLst>
           </a:prstGeom>
           <a:solidFill>
-            <a:srgbClr val="EDDED4"/>
+            <a:srgbClr val="F6E2D5"/>
           </a:solidFill>
           <a:ln w="19050">
-            <a:solidFill>
-              <a:srgbClr val="765037"/>
-            </a:solidFill>
+            <a:noFill/>
             <a:prstDash val="dash"/>
           </a:ln>
         </p:spPr>
@@ -5475,7 +5954,7 @@
             <a:r>
               <a:rPr sz="1200" b="0" i="0">
                 <a:solidFill>
-                  <a:srgbClr val="37261A"/>
+                  <a:srgbClr val="8E8780"/>
                 </a:solidFill>
               </a:rPr>
               <a:t>사진 3</a:t>
@@ -5485,14 +5964,14 @@
       </p:sp>
       <p:sp>
         <p:nvSpPr>
-          <p:cNvPr id="7" name="사진 자리"/>
+          <p:cNvPr id="9" name="사진 자리"/>
           <p:cNvSpPr/>
           <p:nvPr/>
         </p:nvSpPr>
         <p:spPr>
           <a:xfrm>
-            <a:off x="640080" y="4114800"/>
-            <a:ext cx="3515258" cy="2286000"/>
+            <a:off x="640080" y="3977639"/>
+            <a:ext cx="3515258" cy="2194560"/>
           </a:xfrm>
           <a:prstGeom prst="roundRect">
             <a:avLst>
@@ -5500,12 +5979,10 @@
             </a:avLst>
           </a:prstGeom>
           <a:solidFill>
-            <a:srgbClr val="EDDED4"/>
+            <a:srgbClr val="F6E2D5"/>
           </a:solidFill>
           <a:ln w="19050">
-            <a:solidFill>
-              <a:srgbClr val="765037"/>
-            </a:solidFill>
+            <a:noFill/>
             <a:prstDash val="dash"/>
           </a:ln>
         </p:spPr>
@@ -5523,7 +6000,7 @@
             <a:r>
               <a:rPr sz="1200" b="0" i="0">
                 <a:solidFill>
-                  <a:srgbClr val="37261A"/>
+                  <a:srgbClr val="8E8780"/>
                 </a:solidFill>
               </a:rPr>
               <a:t>사진 4</a:t>
@@ -5533,14 +6010,14 @@
       </p:sp>
       <p:sp>
         <p:nvSpPr>
-          <p:cNvPr id="8" name="사진 자리"/>
+          <p:cNvPr id="10" name="사진 자리"/>
           <p:cNvSpPr/>
           <p:nvPr/>
         </p:nvSpPr>
         <p:spPr>
           <a:xfrm>
-            <a:off x="4338218" y="4114800"/>
-            <a:ext cx="3515258" cy="2286000"/>
+            <a:off x="4338218" y="3977639"/>
+            <a:ext cx="3515258" cy="2194560"/>
           </a:xfrm>
           <a:prstGeom prst="roundRect">
             <a:avLst>
@@ -5548,12 +6025,10 @@
             </a:avLst>
           </a:prstGeom>
           <a:solidFill>
-            <a:srgbClr val="EDDED4"/>
+            <a:srgbClr val="F6E2D5"/>
           </a:solidFill>
           <a:ln w="19050">
-            <a:solidFill>
-              <a:srgbClr val="765037"/>
-            </a:solidFill>
+            <a:noFill/>
             <a:prstDash val="dash"/>
           </a:ln>
         </p:spPr>
@@ -5571,7 +6046,7 @@
             <a:r>
               <a:rPr sz="1200" b="0" i="0">
                 <a:solidFill>
-                  <a:srgbClr val="37261A"/>
+                  <a:srgbClr val="8E8780"/>
                 </a:solidFill>
               </a:rPr>
               <a:t>사진 5</a:t>
@@ -5581,14 +6056,14 @@
       </p:sp>
       <p:sp>
         <p:nvSpPr>
-          <p:cNvPr id="9" name="사진 자리"/>
+          <p:cNvPr id="11" name="사진 자리"/>
           <p:cNvSpPr/>
           <p:nvPr/>
         </p:nvSpPr>
         <p:spPr>
           <a:xfrm>
-            <a:off x="8036356" y="4114800"/>
-            <a:ext cx="3515258" cy="2286000"/>
+            <a:off x="8036356" y="3977639"/>
+            <a:ext cx="3515258" cy="2194560"/>
           </a:xfrm>
           <a:prstGeom prst="roundRect">
             <a:avLst>
@@ -5596,12 +6071,10 @@
             </a:avLst>
           </a:prstGeom>
           <a:solidFill>
-            <a:srgbClr val="EDDED4"/>
+            <a:srgbClr val="F6E2D5"/>
           </a:solidFill>
           <a:ln w="19050">
-            <a:solidFill>
-              <a:srgbClr val="765037"/>
-            </a:solidFill>
+            <a:noFill/>
             <a:prstDash val="dash"/>
           </a:ln>
         </p:spPr>
@@ -5619,7 +6092,7 @@
             <a:r>
               <a:rPr sz="1200" b="0" i="0">
                 <a:solidFill>
-                  <a:srgbClr val="37261A"/>
+                  <a:srgbClr val="8E8780"/>
                 </a:solidFill>
               </a:rPr>
               <a:t>사진 6</a:t>
@@ -5638,6 +6111,14 @@
 <file path=ppt/slides/slide6.xml><?xml version="1.0" encoding="utf-8"?>
 <p:sld xmlns:a="http://schemas.openxmlformats.org/drawingml/2006/main" xmlns:p="http://schemas.openxmlformats.org/presentationml/2006/main" xmlns:r="http://schemas.openxmlformats.org/officeDocument/2006/relationships">
   <p:cSld>
+    <p:bg>
+      <p:bgPr>
+        <a:solidFill>
+          <a:srgbClr val="FBF2EC"/>
+        </a:solidFill>
+        <a:effectLst/>
+      </p:bgPr>
+    </p:bg>
     <p:spTree>
       <p:nvGrpSpPr>
         <p:cNvPr id="1" name=""/>
@@ -5645,30 +6126,119 @@
         <p:nvPr/>
       </p:nvGrpSpPr>
       <p:grpSpPr/>
-      <p:pic>
-        <p:nvPicPr>
-          <p:cNvPr id="3" name="표지 그림" descr="wedding-32.jpg"/>
-          <p:cNvPicPr>
-            <a:picLocks noChangeAspect="1"/>
-          </p:cNvPicPr>
-          <p:nvPr/>
-        </p:nvPicPr>
-        <p:blipFill>
-          <a:blip r:embed="rId2"/>
-          <a:stretch>
-            <a:fillRect/>
-          </a:stretch>
-        </p:blipFill>
-        <p:spPr>
-          <a:xfrm>
-            <a:off x="0" y="0"/>
-            <a:ext cx="12191695" cy="6858000"/>
+      <p:sp>
+        <p:nvSpPr>
+          <p:cNvPr id="3" name="사진 자리"/>
+          <p:cNvSpPr/>
+          <p:nvPr/>
+        </p:nvSpPr>
+        <p:spPr>
+          <a:xfrm>
+            <a:off x="7558851" y="685800"/>
+            <a:ext cx="3169840" cy="5486400"/>
+          </a:xfrm>
+          <a:prstGeom prst="round2SameRect">
+            <a:avLst>
+              <a:gd name="adj1" fmla="val 50000"/>
+              <a:gd name="adj2" fmla="val 0"/>
+            </a:avLst>
+          </a:prstGeom>
+          <a:solidFill>
+            <a:srgbClr val="EBC6AD"/>
+          </a:solidFill>
+          <a:ln>
+            <a:noFill/>
+          </a:ln>
+        </p:spPr>
+        <p:txBody>
+          <a:bodyPr rtlCol="0" anchor="ctr" wrap="square" lIns="54864" rIns="54864" tIns="27432" bIns="27432">
+            <a:noAutofit/>
+          </a:bodyPr>
+          <a:lstStyle/>
+          <a:p>
+            <a:pPr algn="ctr">
+              <a:lnSpc>
+                <a:spcPct val="100000"/>
+              </a:lnSpc>
+            </a:pPr>
+            <a:r>
+              <a:rPr sz="1400" b="0" i="0">
+                <a:solidFill>
+                  <a:srgbClr val="493527"/>
+                </a:solidFill>
+              </a:rPr>
+              <a:t>사진을 넣어 주세요</a:t>
+            </a:r>
+          </a:p>
+        </p:txBody>
+      </p:sp>
+      <p:sp>
+        <p:nvSpPr>
+          <p:cNvPr id="4" name="장식"/>
+          <p:cNvSpPr/>
+          <p:nvPr/>
+        </p:nvSpPr>
+        <p:spPr>
+          <a:xfrm>
+            <a:off x="6827349" y="4251960"/>
+            <a:ext cx="1005840" cy="1005840"/>
+          </a:xfrm>
+          <a:prstGeom prst="ellipse">
+            <a:avLst/>
+          </a:prstGeom>
+          <a:solidFill>
+            <a:srgbClr val="EBC6AD"/>
+          </a:solidFill>
+          <a:ln>
+            <a:noFill/>
+          </a:ln>
+        </p:spPr>
+        <p:txBody>
+          <a:bodyPr rtlCol="0" anchor="ctr"/>
+          <a:lstStyle/>
+          <a:p>
+            <a:pPr algn="ctr"/>
+          </a:p>
+        </p:txBody>
+      </p:sp>
+      <p:sp>
+        <p:nvSpPr>
+          <p:cNvPr id="5" name="라벨"/>
+          <p:cNvSpPr txBox="1"/>
+          <p:nvPr/>
+        </p:nvSpPr>
+        <p:spPr>
+          <a:xfrm>
+            <a:off x="822960" y="2148840"/>
+            <a:ext cx="5608179" cy="274320"/>
           </a:xfrm>
           <a:prstGeom prst="rect">
             <a:avLst/>
           </a:prstGeom>
-        </p:spPr>
-      </p:pic>
+          <a:noFill/>
+        </p:spPr>
+        <p:txBody>
+          <a:bodyPr wrap="square" lIns="54864" rIns="54864" tIns="27432" bIns="27432" anchor="t">
+            <a:noAutofit/>
+          </a:bodyPr>
+          <a:lstStyle/>
+          <a:p>
+            <a:pPr algn="l">
+              <a:lnSpc>
+                <a:spcPct val="115000"/>
+              </a:lnSpc>
+            </a:pPr>
+            <a:r>
+              <a:rPr sz="1000" b="1" i="0" spc="250">
+                <a:solidFill>
+                  <a:srgbClr val="26231F"/>
+                </a:solidFill>
+              </a:rPr>
+              <a:t>WEDDING</a:t>
+            </a:r>
+          </a:p>
+        </p:txBody>
+      </p:sp>
       <p:sp>
         <p:nvSpPr>
           <p:cNvPr id="2" name="Title 1"/>
@@ -5681,8 +6251,8 @@
         </p:nvSpPr>
         <p:spPr>
           <a:xfrm>
-            <a:off x="853418" y="2057400"/>
-            <a:ext cx="6095847" cy="1554480"/>
+            <a:off x="822960" y="2606040"/>
+            <a:ext cx="5608179" cy="1188720"/>
           </a:xfrm>
         </p:spPr>
         <p:txBody>
@@ -5699,7 +6269,7 @@
             <a:r>
               <a:rPr sz="3400" b="1" i="0">
                 <a:solidFill>
-                  <a:srgbClr val="37261A"/>
+                  <a:srgbClr val="26231F"/>
                 </a:solidFill>
               </a:rPr>
               <a:t>와 주셔서 고맙습니다</a:t>
@@ -5709,14 +6279,14 @@
       </p:sp>
       <p:sp>
         <p:nvSpPr>
-          <p:cNvPr id="4" name="한 줄 문구"/>
+          <p:cNvPr id="6" name="한 줄 문구"/>
           <p:cNvSpPr txBox="1"/>
           <p:nvPr/>
         </p:nvSpPr>
         <p:spPr>
           <a:xfrm>
-            <a:off x="853418" y="3749039"/>
-            <a:ext cx="6095847" cy="822960"/>
+            <a:off x="822960" y="3886200"/>
+            <a:ext cx="5608179" cy="822960"/>
           </a:xfrm>
           <a:prstGeom prst="rect">
             <a:avLst/>
@@ -5735,9 +6305,9 @@
               </a:lnSpc>
             </a:pPr>
             <a:r>
-              <a:rPr sz="1700" b="0" i="1">
-                <a:solidFill>
-                  <a:srgbClr val="37261A"/>
+              <a:rPr sz="1700" b="0" i="0">
+                <a:solidFill>
+                  <a:srgbClr val="26231F"/>
                 </a:solidFill>
               </a:rPr>
               <a:t>잘 살겠습니다</a:t>
@@ -5747,14 +6317,14 @@
       </p:sp>
       <p:sp>
         <p:nvSpPr>
-          <p:cNvPr id="5" name="안내 문구"/>
+          <p:cNvPr id="7" name="안내 문구"/>
           <p:cNvSpPr txBox="1"/>
           <p:nvPr/>
         </p:nvSpPr>
         <p:spPr>
           <a:xfrm>
-            <a:off x="853418" y="4617720"/>
-            <a:ext cx="6095847" cy="914400"/>
+            <a:off x="822960" y="4754880"/>
+            <a:ext cx="5608179" cy="914400"/>
           </a:xfrm>
           <a:prstGeom prst="rect">
             <a:avLst/>
@@ -5775,7 +6345,7 @@
             <a:r>
               <a:rPr sz="1400" b="0" i="0">
                 <a:solidFill>
-                  <a:srgbClr val="666666"/>
+                  <a:srgbClr val="26231F"/>
                 </a:solidFill>
               </a:rPr>
               <a:t>신랑 이름 ♥ 신부 이름</a:t>
@@ -5802,34 +6372,34 @@
         <a:sysClr val="window" lastClr="FFFFFF"/>
       </a:lt1>
       <a:dk2>
-        <a:srgbClr val="37261A"/>
+        <a:srgbClr val="493527"/>
       </a:dk2>
       <a:lt2>
-        <a:srgbClr val="F8F4F1"/>
+        <a:srgbClr val="FBF2EC"/>
       </a:lt2>
       <a:accent1>
-        <a:srgbClr val="765037"/>
+        <a:srgbClr val="D89F79"/>
       </a:accent1>
       <a:accent2>
-        <a:srgbClr val="418B83"/>
+        <a:srgbClr val="E1D798"/>
       </a:accent2>
       <a:accent3>
-        <a:srgbClr val="37261A"/>
+        <a:srgbClr val="493527"/>
       </a:accent3>
       <a:accent4>
-        <a:srgbClr val="EDDED4"/>
+        <a:srgbClr val="F6E2D5"/>
       </a:accent4>
       <a:accent5>
-        <a:srgbClr val="5C6E5D"/>
+        <a:srgbClr val="DCBB88"/>
       </a:accent5>
       <a:accent6>
-        <a:srgbClr val="877D76"/>
+        <a:srgbClr val="92867D"/>
       </a:accent6>
       <a:hlink>
-        <a:srgbClr val="765037"/>
+        <a:srgbClr val="D89F79"/>
       </a:hlink>
       <a:folHlink>
-        <a:srgbClr val="37261A"/>
+        <a:srgbClr val="493527"/>
       </a:folHlink>
     </a:clrScheme>
     <a:fontScheme name="Office">
